--- a/docs/SmartKYC_Presentation_V02.pptx
+++ b/docs/SmartKYC_Presentation_V02.pptx
@@ -1940,10 +1940,9 @@
                   <a:srgbClr val="5A7CA8"/>
                 </a:solidFill>
                 <a:latin typeface="Calibri" pitchFamily="34" charset="0"/>
-                <a:ea typeface="Calibri" pitchFamily="34" charset="-122"/>
-                <a:cs typeface="Calibri" pitchFamily="34" charset="-120"/>
-              </a:rPr>
-              <a:t>SmartKYC Compliance Platform  </a:t>
+                <a:cs typeface="Calibri" pitchFamily="34" charset="-120"/>
+              </a:rPr>
+              <a:t>By Vickey Panjiyar</a:t>
             </a:r>
             <a:endParaRPr lang="en-US" sz="900" dirty="0"/>
           </a:p>
